--- a/video/Video TFM - Determinantes y predicción del salario de las mujeres.pptx
+++ b/video/Video TFM - Determinantes y predicción del salario de las mujeres.pptx
@@ -600,7 +600,7 @@
             </a:r>
             <a:r>
               <a:rPr lang="en-US" dirty="0" err="1"/>
-              <a:t>ocupadas</a:t>
+              <a:t>asalariadas</a:t>
             </a:r>
             <a:r>
               <a:rPr lang="en-US" dirty="0"/>
@@ -2828,7 +2828,7 @@
                   <a:srgbClr val="FBFAF6"/>
                 </a:solidFill>
               </a:rPr>
-              <a:t>ocupadas</a:t>
+              <a:t>asalariadas</a:t>
             </a:r>
             <a:r>
               <a:rPr lang="en-US" sz="4400" b="1" i="0" dirty="0">
